--- a/public/videos/repositories/sauna-map/sauna-map-tech-preview.pptx
+++ b/public/videos/repositories/sauna-map/sauna-map-tech-preview.pptx
@@ -134,7 +134,7 @@
           <p:cNvPr id="2" name="タイトル 1">
             <a:extLst>
               <a:ext uri="{FF2B5EF4-FFF2-40B4-BE49-F238E27FC236}">
-                <a16:creationId xmlns:a16="http://schemas.microsoft.com/office/drawing/2014/main" id="{AF839923-383C-1DBF-60EC-1176BEA7A613}"/>
+                <a16:creationId xmlns:a16="http://schemas.microsoft.com/office/drawing/2014/main" id="{282BE8A6-DC56-E8D4-AA86-0198D2B91284}"/>
               </a:ext>
             </a:extLst>
           </p:cNvPr>
@@ -171,7 +171,7 @@
           <p:cNvPr id="3" name="字幕 2">
             <a:extLst>
               <a:ext uri="{FF2B5EF4-FFF2-40B4-BE49-F238E27FC236}">
-                <a16:creationId xmlns:a16="http://schemas.microsoft.com/office/drawing/2014/main" id="{285255BA-4010-B768-FCB3-69A4201C51D9}"/>
+                <a16:creationId xmlns:a16="http://schemas.microsoft.com/office/drawing/2014/main" id="{08688CBA-B089-0573-FC48-918C50F6BC12}"/>
               </a:ext>
             </a:extLst>
           </p:cNvPr>
@@ -241,7 +241,7 @@
           <p:cNvPr id="4" name="日付プレースホルダー 3">
             <a:extLst>
               <a:ext uri="{FF2B5EF4-FFF2-40B4-BE49-F238E27FC236}">
-                <a16:creationId xmlns:a16="http://schemas.microsoft.com/office/drawing/2014/main" id="{DB03B2A5-F24F-CD00-CE74-BF2C3E85BB0C}"/>
+                <a16:creationId xmlns:a16="http://schemas.microsoft.com/office/drawing/2014/main" id="{82517C0C-4CE3-D8E9-F180-56388C545D27}"/>
               </a:ext>
             </a:extLst>
           </p:cNvPr>
@@ -257,7 +257,7 @@
           <a:bodyPr/>
           <a:lstStyle/>
           <a:p>
-            <a:fld id="{84BE9DB3-D6E0-4A1E-8EE9-71F95B4242BD}" type="datetimeFigureOut">
+            <a:fld id="{C78859A6-1FE5-4288-BA83-4A670086B26A}" type="datetimeFigureOut">
               <a:rPr kumimoji="1" lang="ja-JP" altLang="en-US" smtClean="0"/>
               <a:t>2026/7/30</a:t>
             </a:fld>
@@ -270,7 +270,7 @@
           <p:cNvPr id="5" name="フッター プレースホルダー 4">
             <a:extLst>
               <a:ext uri="{FF2B5EF4-FFF2-40B4-BE49-F238E27FC236}">
-                <a16:creationId xmlns:a16="http://schemas.microsoft.com/office/drawing/2014/main" id="{FA994084-6442-F2A5-B6EB-5E3BC8232080}"/>
+                <a16:creationId xmlns:a16="http://schemas.microsoft.com/office/drawing/2014/main" id="{AA66D54A-F6F4-FEA3-FF00-284588C60A25}"/>
               </a:ext>
             </a:extLst>
           </p:cNvPr>
@@ -295,7 +295,7 @@
           <p:cNvPr id="6" name="スライド番号プレースホルダー 5">
             <a:extLst>
               <a:ext uri="{FF2B5EF4-FFF2-40B4-BE49-F238E27FC236}">
-                <a16:creationId xmlns:a16="http://schemas.microsoft.com/office/drawing/2014/main" id="{166EED2C-4441-CF01-AEC6-01056E0EAEF6}"/>
+                <a16:creationId xmlns:a16="http://schemas.microsoft.com/office/drawing/2014/main" id="{B04A5C97-EBF3-4F47-3C73-954F29BD2E1E}"/>
               </a:ext>
             </a:extLst>
           </p:cNvPr>
@@ -311,7 +311,7 @@
           <a:bodyPr/>
           <a:lstStyle/>
           <a:p>
-            <a:fld id="{8652984F-2DCF-4D3F-87FE-96960A49E255}" type="slidenum">
+            <a:fld id="{BD7739A3-EDF2-49D3-990C-7DE66E176CC4}" type="slidenum">
               <a:rPr kumimoji="1" lang="ja-JP" altLang="en-US" smtClean="0"/>
               <a:t>‹#›</a:t>
             </a:fld>
@@ -322,7 +322,7 @@
     </p:spTree>
     <p:extLst>
       <p:ext uri="{BB962C8B-B14F-4D97-AF65-F5344CB8AC3E}">
-        <p14:creationId xmlns:p14="http://schemas.microsoft.com/office/powerpoint/2010/main" val="1939199255"/>
+        <p14:creationId xmlns:p14="http://schemas.microsoft.com/office/powerpoint/2010/main" val="2810649668"/>
       </p:ext>
     </p:extLst>
   </p:cSld>
@@ -354,7 +354,7 @@
           <p:cNvPr id="2" name="タイトル 1">
             <a:extLst>
               <a:ext uri="{FF2B5EF4-FFF2-40B4-BE49-F238E27FC236}">
-                <a16:creationId xmlns:a16="http://schemas.microsoft.com/office/drawing/2014/main" id="{C6E9E5E5-C7BB-A2B7-983C-993EAFD696D5}"/>
+                <a16:creationId xmlns:a16="http://schemas.microsoft.com/office/drawing/2014/main" id="{0518259C-9E27-2D2D-6F4C-C88C0184E07D}"/>
               </a:ext>
             </a:extLst>
           </p:cNvPr>
@@ -382,7 +382,7 @@
           <p:cNvPr id="3" name="縦書きテキスト プレースホルダー 2">
             <a:extLst>
               <a:ext uri="{FF2B5EF4-FFF2-40B4-BE49-F238E27FC236}">
-                <a16:creationId xmlns:a16="http://schemas.microsoft.com/office/drawing/2014/main" id="{FFAD58E0-311A-5E53-5508-B367059E59F2}"/>
+                <a16:creationId xmlns:a16="http://schemas.microsoft.com/office/drawing/2014/main" id="{FBD9FFE3-87CF-8211-0BBC-522E0EDB499E}"/>
               </a:ext>
             </a:extLst>
           </p:cNvPr>
@@ -471,7 +471,7 @@
           <p:cNvPr id="4" name="日付プレースホルダー 3">
             <a:extLst>
               <a:ext uri="{FF2B5EF4-FFF2-40B4-BE49-F238E27FC236}">
-                <a16:creationId xmlns:a16="http://schemas.microsoft.com/office/drawing/2014/main" id="{978ADF44-F5B7-F32A-68D0-739D4455A44A}"/>
+                <a16:creationId xmlns:a16="http://schemas.microsoft.com/office/drawing/2014/main" id="{087C6263-9317-CECB-C7DF-AA23CEE74FC5}"/>
               </a:ext>
             </a:extLst>
           </p:cNvPr>
@@ -487,7 +487,7 @@
           <a:bodyPr/>
           <a:lstStyle/>
           <a:p>
-            <a:fld id="{84BE9DB3-D6E0-4A1E-8EE9-71F95B4242BD}" type="datetimeFigureOut">
+            <a:fld id="{C78859A6-1FE5-4288-BA83-4A670086B26A}" type="datetimeFigureOut">
               <a:rPr kumimoji="1" lang="ja-JP" altLang="en-US" smtClean="0"/>
               <a:t>2026/7/30</a:t>
             </a:fld>
@@ -500,7 +500,7 @@
           <p:cNvPr id="5" name="フッター プレースホルダー 4">
             <a:extLst>
               <a:ext uri="{FF2B5EF4-FFF2-40B4-BE49-F238E27FC236}">
-                <a16:creationId xmlns:a16="http://schemas.microsoft.com/office/drawing/2014/main" id="{4C746765-6B88-E87D-323D-5704E477F829}"/>
+                <a16:creationId xmlns:a16="http://schemas.microsoft.com/office/drawing/2014/main" id="{60392B72-017D-2F1E-5A2A-559416FC4BE2}"/>
               </a:ext>
             </a:extLst>
           </p:cNvPr>
@@ -525,7 +525,7 @@
           <p:cNvPr id="6" name="スライド番号プレースホルダー 5">
             <a:extLst>
               <a:ext uri="{FF2B5EF4-FFF2-40B4-BE49-F238E27FC236}">
-                <a16:creationId xmlns:a16="http://schemas.microsoft.com/office/drawing/2014/main" id="{3A679506-7EC3-2B51-7B7D-D3DC2C6050F0}"/>
+                <a16:creationId xmlns:a16="http://schemas.microsoft.com/office/drawing/2014/main" id="{3081A843-ADB2-1AC8-CB56-D04E933B0709}"/>
               </a:ext>
             </a:extLst>
           </p:cNvPr>
@@ -541,7 +541,7 @@
           <a:bodyPr/>
           <a:lstStyle/>
           <a:p>
-            <a:fld id="{8652984F-2DCF-4D3F-87FE-96960A49E255}" type="slidenum">
+            <a:fld id="{BD7739A3-EDF2-49D3-990C-7DE66E176CC4}" type="slidenum">
               <a:rPr kumimoji="1" lang="ja-JP" altLang="en-US" smtClean="0"/>
               <a:t>‹#›</a:t>
             </a:fld>
@@ -552,7 +552,7 @@
     </p:spTree>
     <p:extLst>
       <p:ext uri="{BB962C8B-B14F-4D97-AF65-F5344CB8AC3E}">
-        <p14:creationId xmlns:p14="http://schemas.microsoft.com/office/powerpoint/2010/main" val="3372272046"/>
+        <p14:creationId xmlns:p14="http://schemas.microsoft.com/office/powerpoint/2010/main" val="309559315"/>
       </p:ext>
     </p:extLst>
   </p:cSld>
@@ -584,7 +584,7 @@
           <p:cNvPr id="2" name="縦書きタイトル 1">
             <a:extLst>
               <a:ext uri="{FF2B5EF4-FFF2-40B4-BE49-F238E27FC236}">
-                <a16:creationId xmlns:a16="http://schemas.microsoft.com/office/drawing/2014/main" id="{1AB815F4-0C3F-5BBB-0192-CE0623441E80}"/>
+                <a16:creationId xmlns:a16="http://schemas.microsoft.com/office/drawing/2014/main" id="{4FCF2BFD-CA50-6C97-BD77-452423BDA685}"/>
               </a:ext>
             </a:extLst>
           </p:cNvPr>
@@ -617,7 +617,7 @@
           <p:cNvPr id="3" name="縦書きテキスト プレースホルダー 2">
             <a:extLst>
               <a:ext uri="{FF2B5EF4-FFF2-40B4-BE49-F238E27FC236}">
-                <a16:creationId xmlns:a16="http://schemas.microsoft.com/office/drawing/2014/main" id="{4A3B1A37-D329-F16C-2171-FF62E57604F1}"/>
+                <a16:creationId xmlns:a16="http://schemas.microsoft.com/office/drawing/2014/main" id="{D9C88C2B-5825-13CC-097B-659B737C2DA9}"/>
               </a:ext>
             </a:extLst>
           </p:cNvPr>
@@ -711,7 +711,7 @@
           <p:cNvPr id="4" name="日付プレースホルダー 3">
             <a:extLst>
               <a:ext uri="{FF2B5EF4-FFF2-40B4-BE49-F238E27FC236}">
-                <a16:creationId xmlns:a16="http://schemas.microsoft.com/office/drawing/2014/main" id="{DD0551AB-B033-0A99-AAAC-A71BA725E143}"/>
+                <a16:creationId xmlns:a16="http://schemas.microsoft.com/office/drawing/2014/main" id="{37AFB061-6A64-CF03-430B-4B9320EAC69E}"/>
               </a:ext>
             </a:extLst>
           </p:cNvPr>
@@ -727,7 +727,7 @@
           <a:bodyPr/>
           <a:lstStyle/>
           <a:p>
-            <a:fld id="{84BE9DB3-D6E0-4A1E-8EE9-71F95B4242BD}" type="datetimeFigureOut">
+            <a:fld id="{C78859A6-1FE5-4288-BA83-4A670086B26A}" type="datetimeFigureOut">
               <a:rPr kumimoji="1" lang="ja-JP" altLang="en-US" smtClean="0"/>
               <a:t>2026/7/30</a:t>
             </a:fld>
@@ -740,7 +740,7 @@
           <p:cNvPr id="5" name="フッター プレースホルダー 4">
             <a:extLst>
               <a:ext uri="{FF2B5EF4-FFF2-40B4-BE49-F238E27FC236}">
-                <a16:creationId xmlns:a16="http://schemas.microsoft.com/office/drawing/2014/main" id="{88624CC4-A414-C4F1-497D-309D36649402}"/>
+                <a16:creationId xmlns:a16="http://schemas.microsoft.com/office/drawing/2014/main" id="{96BCFB71-D5E7-B4A1-022F-5D82E249B639}"/>
               </a:ext>
             </a:extLst>
           </p:cNvPr>
@@ -765,7 +765,7 @@
           <p:cNvPr id="6" name="スライド番号プレースホルダー 5">
             <a:extLst>
               <a:ext uri="{FF2B5EF4-FFF2-40B4-BE49-F238E27FC236}">
-                <a16:creationId xmlns:a16="http://schemas.microsoft.com/office/drawing/2014/main" id="{B8A7A4D3-C9F1-182E-468A-A6CCB99B8AA4}"/>
+                <a16:creationId xmlns:a16="http://schemas.microsoft.com/office/drawing/2014/main" id="{377439D2-B8AD-17B7-AAFE-BF3208B115CA}"/>
               </a:ext>
             </a:extLst>
           </p:cNvPr>
@@ -781,7 +781,7 @@
           <a:bodyPr/>
           <a:lstStyle/>
           <a:p>
-            <a:fld id="{8652984F-2DCF-4D3F-87FE-96960A49E255}" type="slidenum">
+            <a:fld id="{BD7739A3-EDF2-49D3-990C-7DE66E176CC4}" type="slidenum">
               <a:rPr kumimoji="1" lang="ja-JP" altLang="en-US" smtClean="0"/>
               <a:t>‹#›</a:t>
             </a:fld>
@@ -792,7 +792,7 @@
     </p:spTree>
     <p:extLst>
       <p:ext uri="{BB962C8B-B14F-4D97-AF65-F5344CB8AC3E}">
-        <p14:creationId xmlns:p14="http://schemas.microsoft.com/office/powerpoint/2010/main" val="560976808"/>
+        <p14:creationId xmlns:p14="http://schemas.microsoft.com/office/powerpoint/2010/main" val="2101650428"/>
       </p:ext>
     </p:extLst>
   </p:cSld>
@@ -824,7 +824,7 @@
           <p:cNvPr id="2" name="タイトル 1">
             <a:extLst>
               <a:ext uri="{FF2B5EF4-FFF2-40B4-BE49-F238E27FC236}">
-                <a16:creationId xmlns:a16="http://schemas.microsoft.com/office/drawing/2014/main" id="{05CD177E-AB72-42D3-7D99-E97E9C68F178}"/>
+                <a16:creationId xmlns:a16="http://schemas.microsoft.com/office/drawing/2014/main" id="{AD8BE4B8-0339-9D0A-AC17-C124D5625ED2}"/>
               </a:ext>
             </a:extLst>
           </p:cNvPr>
@@ -852,7 +852,7 @@
           <p:cNvPr id="3" name="コンテンツ プレースホルダー 2">
             <a:extLst>
               <a:ext uri="{FF2B5EF4-FFF2-40B4-BE49-F238E27FC236}">
-                <a16:creationId xmlns:a16="http://schemas.microsoft.com/office/drawing/2014/main" id="{A47F1F0E-3761-1E59-1F02-C7160D9159DF}"/>
+                <a16:creationId xmlns:a16="http://schemas.microsoft.com/office/drawing/2014/main" id="{8C694EB6-48C9-89F3-1B9F-5B9CBDB02FA4}"/>
               </a:ext>
             </a:extLst>
           </p:cNvPr>
@@ -941,7 +941,7 @@
           <p:cNvPr id="4" name="日付プレースホルダー 3">
             <a:extLst>
               <a:ext uri="{FF2B5EF4-FFF2-40B4-BE49-F238E27FC236}">
-                <a16:creationId xmlns:a16="http://schemas.microsoft.com/office/drawing/2014/main" id="{0953EE96-C456-2F71-8199-EE657A9C93B9}"/>
+                <a16:creationId xmlns:a16="http://schemas.microsoft.com/office/drawing/2014/main" id="{3388F93A-6EC4-5978-A757-3D84F4A6386D}"/>
               </a:ext>
             </a:extLst>
           </p:cNvPr>
@@ -957,7 +957,7 @@
           <a:bodyPr/>
           <a:lstStyle/>
           <a:p>
-            <a:fld id="{84BE9DB3-D6E0-4A1E-8EE9-71F95B4242BD}" type="datetimeFigureOut">
+            <a:fld id="{C78859A6-1FE5-4288-BA83-4A670086B26A}" type="datetimeFigureOut">
               <a:rPr kumimoji="1" lang="ja-JP" altLang="en-US" smtClean="0"/>
               <a:t>2026/7/30</a:t>
             </a:fld>
@@ -970,7 +970,7 @@
           <p:cNvPr id="5" name="フッター プレースホルダー 4">
             <a:extLst>
               <a:ext uri="{FF2B5EF4-FFF2-40B4-BE49-F238E27FC236}">
-                <a16:creationId xmlns:a16="http://schemas.microsoft.com/office/drawing/2014/main" id="{62DB7237-81BA-B08F-9CD0-866DDF5B588A}"/>
+                <a16:creationId xmlns:a16="http://schemas.microsoft.com/office/drawing/2014/main" id="{A43CF2E8-92C1-23AE-900C-23057F2414E8}"/>
               </a:ext>
             </a:extLst>
           </p:cNvPr>
@@ -995,7 +995,7 @@
           <p:cNvPr id="6" name="スライド番号プレースホルダー 5">
             <a:extLst>
               <a:ext uri="{FF2B5EF4-FFF2-40B4-BE49-F238E27FC236}">
-                <a16:creationId xmlns:a16="http://schemas.microsoft.com/office/drawing/2014/main" id="{2B14F7EF-3D0A-706A-AA1C-DE45FDFBE6DB}"/>
+                <a16:creationId xmlns:a16="http://schemas.microsoft.com/office/drawing/2014/main" id="{5BD83CB9-FE16-03FA-7FA8-4F9148676B3E}"/>
               </a:ext>
             </a:extLst>
           </p:cNvPr>
@@ -1011,7 +1011,7 @@
           <a:bodyPr/>
           <a:lstStyle/>
           <a:p>
-            <a:fld id="{8652984F-2DCF-4D3F-87FE-96960A49E255}" type="slidenum">
+            <a:fld id="{BD7739A3-EDF2-49D3-990C-7DE66E176CC4}" type="slidenum">
               <a:rPr kumimoji="1" lang="ja-JP" altLang="en-US" smtClean="0"/>
               <a:t>‹#›</a:t>
             </a:fld>
@@ -1022,7 +1022,7 @@
     </p:spTree>
     <p:extLst>
       <p:ext uri="{BB962C8B-B14F-4D97-AF65-F5344CB8AC3E}">
-        <p14:creationId xmlns:p14="http://schemas.microsoft.com/office/powerpoint/2010/main" val="2718826723"/>
+        <p14:creationId xmlns:p14="http://schemas.microsoft.com/office/powerpoint/2010/main" val="3777631726"/>
       </p:ext>
     </p:extLst>
   </p:cSld>
@@ -1054,7 +1054,7 @@
           <p:cNvPr id="2" name="タイトル 1">
             <a:extLst>
               <a:ext uri="{FF2B5EF4-FFF2-40B4-BE49-F238E27FC236}">
-                <a16:creationId xmlns:a16="http://schemas.microsoft.com/office/drawing/2014/main" id="{255ECFAF-0F55-4362-FBEC-0EEFB91A7077}"/>
+                <a16:creationId xmlns:a16="http://schemas.microsoft.com/office/drawing/2014/main" id="{FE5ACF33-7A05-87D3-E555-F332921201FE}"/>
               </a:ext>
             </a:extLst>
           </p:cNvPr>
@@ -1091,7 +1091,7 @@
           <p:cNvPr id="3" name="テキスト プレースホルダー 2">
             <a:extLst>
               <a:ext uri="{FF2B5EF4-FFF2-40B4-BE49-F238E27FC236}">
-                <a16:creationId xmlns:a16="http://schemas.microsoft.com/office/drawing/2014/main" id="{A06FAFD6-6DC2-87C8-2B71-719C147CB7B2}"/>
+                <a16:creationId xmlns:a16="http://schemas.microsoft.com/office/drawing/2014/main" id="{C58E31E7-74CB-6385-A390-D24655AA52B8}"/>
               </a:ext>
             </a:extLst>
           </p:cNvPr>
@@ -1216,7 +1216,7 @@
           <p:cNvPr id="4" name="日付プレースホルダー 3">
             <a:extLst>
               <a:ext uri="{FF2B5EF4-FFF2-40B4-BE49-F238E27FC236}">
-                <a16:creationId xmlns:a16="http://schemas.microsoft.com/office/drawing/2014/main" id="{B0F472DA-5F6E-191F-8CB6-4EA6AB57DF04}"/>
+                <a16:creationId xmlns:a16="http://schemas.microsoft.com/office/drawing/2014/main" id="{20008B08-438E-9F2A-B56C-79B254BFD0D8}"/>
               </a:ext>
             </a:extLst>
           </p:cNvPr>
@@ -1232,7 +1232,7 @@
           <a:bodyPr/>
           <a:lstStyle/>
           <a:p>
-            <a:fld id="{84BE9DB3-D6E0-4A1E-8EE9-71F95B4242BD}" type="datetimeFigureOut">
+            <a:fld id="{C78859A6-1FE5-4288-BA83-4A670086B26A}" type="datetimeFigureOut">
               <a:rPr kumimoji="1" lang="ja-JP" altLang="en-US" smtClean="0"/>
               <a:t>2026/7/30</a:t>
             </a:fld>
@@ -1245,7 +1245,7 @@
           <p:cNvPr id="5" name="フッター プレースホルダー 4">
             <a:extLst>
               <a:ext uri="{FF2B5EF4-FFF2-40B4-BE49-F238E27FC236}">
-                <a16:creationId xmlns:a16="http://schemas.microsoft.com/office/drawing/2014/main" id="{06C23CB0-36CF-1E93-F5B0-7B77EFFB5FA3}"/>
+                <a16:creationId xmlns:a16="http://schemas.microsoft.com/office/drawing/2014/main" id="{422CC84F-49FF-B5D4-F25D-C79F396FC4B3}"/>
               </a:ext>
             </a:extLst>
           </p:cNvPr>
@@ -1270,7 +1270,7 @@
           <p:cNvPr id="6" name="スライド番号プレースホルダー 5">
             <a:extLst>
               <a:ext uri="{FF2B5EF4-FFF2-40B4-BE49-F238E27FC236}">
-                <a16:creationId xmlns:a16="http://schemas.microsoft.com/office/drawing/2014/main" id="{BD7CD868-8084-BDC2-ABCE-BD8ACFA5A6A4}"/>
+                <a16:creationId xmlns:a16="http://schemas.microsoft.com/office/drawing/2014/main" id="{B2A40D01-69EA-4D23-70B6-4A69916CA17A}"/>
               </a:ext>
             </a:extLst>
           </p:cNvPr>
@@ -1286,7 +1286,7 @@
           <a:bodyPr/>
           <a:lstStyle/>
           <a:p>
-            <a:fld id="{8652984F-2DCF-4D3F-87FE-96960A49E255}" type="slidenum">
+            <a:fld id="{BD7739A3-EDF2-49D3-990C-7DE66E176CC4}" type="slidenum">
               <a:rPr kumimoji="1" lang="ja-JP" altLang="en-US" smtClean="0"/>
               <a:t>‹#›</a:t>
             </a:fld>
@@ -1297,7 +1297,7 @@
     </p:spTree>
     <p:extLst>
       <p:ext uri="{BB962C8B-B14F-4D97-AF65-F5344CB8AC3E}">
-        <p14:creationId xmlns:p14="http://schemas.microsoft.com/office/powerpoint/2010/main" val="2944436570"/>
+        <p14:creationId xmlns:p14="http://schemas.microsoft.com/office/powerpoint/2010/main" val="2237151027"/>
       </p:ext>
     </p:extLst>
   </p:cSld>
@@ -1329,7 +1329,7 @@
           <p:cNvPr id="2" name="タイトル 1">
             <a:extLst>
               <a:ext uri="{FF2B5EF4-FFF2-40B4-BE49-F238E27FC236}">
-                <a16:creationId xmlns:a16="http://schemas.microsoft.com/office/drawing/2014/main" id="{5BCCB1B6-14E4-6A13-AACE-49EBF11AC1A9}"/>
+                <a16:creationId xmlns:a16="http://schemas.microsoft.com/office/drawing/2014/main" id="{0958E6CC-5A31-0D67-5FF0-0C1896DA6E02}"/>
               </a:ext>
             </a:extLst>
           </p:cNvPr>
@@ -1357,7 +1357,7 @@
           <p:cNvPr id="3" name="コンテンツ プレースホルダー 2">
             <a:extLst>
               <a:ext uri="{FF2B5EF4-FFF2-40B4-BE49-F238E27FC236}">
-                <a16:creationId xmlns:a16="http://schemas.microsoft.com/office/drawing/2014/main" id="{64303AFA-745C-CC11-A970-1C94D021D35F}"/>
+                <a16:creationId xmlns:a16="http://schemas.microsoft.com/office/drawing/2014/main" id="{DCF4313C-1EC9-0087-58C3-1B9B6F1581EA}"/>
               </a:ext>
             </a:extLst>
           </p:cNvPr>
@@ -1451,7 +1451,7 @@
           <p:cNvPr id="4" name="コンテンツ プレースホルダー 3">
             <a:extLst>
               <a:ext uri="{FF2B5EF4-FFF2-40B4-BE49-F238E27FC236}">
-                <a16:creationId xmlns:a16="http://schemas.microsoft.com/office/drawing/2014/main" id="{C079AE5D-1D75-6FF8-B804-D7D448EC2958}"/>
+                <a16:creationId xmlns:a16="http://schemas.microsoft.com/office/drawing/2014/main" id="{F3FBD9E7-DC7D-EC14-3853-CAAAF2564D84}"/>
               </a:ext>
             </a:extLst>
           </p:cNvPr>
@@ -1545,7 +1545,7 @@
           <p:cNvPr id="5" name="日付プレースホルダー 4">
             <a:extLst>
               <a:ext uri="{FF2B5EF4-FFF2-40B4-BE49-F238E27FC236}">
-                <a16:creationId xmlns:a16="http://schemas.microsoft.com/office/drawing/2014/main" id="{AD7B0860-E2F3-41C3-4563-B0A1DCED0589}"/>
+                <a16:creationId xmlns:a16="http://schemas.microsoft.com/office/drawing/2014/main" id="{8F15914B-7508-5E3E-ADF1-7AD69C24B9A5}"/>
               </a:ext>
             </a:extLst>
           </p:cNvPr>
@@ -1561,7 +1561,7 @@
           <a:bodyPr/>
           <a:lstStyle/>
           <a:p>
-            <a:fld id="{84BE9DB3-D6E0-4A1E-8EE9-71F95B4242BD}" type="datetimeFigureOut">
+            <a:fld id="{C78859A6-1FE5-4288-BA83-4A670086B26A}" type="datetimeFigureOut">
               <a:rPr kumimoji="1" lang="ja-JP" altLang="en-US" smtClean="0"/>
               <a:t>2026/7/30</a:t>
             </a:fld>
@@ -1574,7 +1574,7 @@
           <p:cNvPr id="6" name="フッター プレースホルダー 5">
             <a:extLst>
               <a:ext uri="{FF2B5EF4-FFF2-40B4-BE49-F238E27FC236}">
-                <a16:creationId xmlns:a16="http://schemas.microsoft.com/office/drawing/2014/main" id="{2569688E-4A7B-EF8B-9AD9-40948AE242A3}"/>
+                <a16:creationId xmlns:a16="http://schemas.microsoft.com/office/drawing/2014/main" id="{BC388EDA-77F5-055A-3E11-0E2D7B032F35}"/>
               </a:ext>
             </a:extLst>
           </p:cNvPr>
@@ -1599,7 +1599,7 @@
           <p:cNvPr id="7" name="スライド番号プレースホルダー 6">
             <a:extLst>
               <a:ext uri="{FF2B5EF4-FFF2-40B4-BE49-F238E27FC236}">
-                <a16:creationId xmlns:a16="http://schemas.microsoft.com/office/drawing/2014/main" id="{D0EE2550-2EA0-1A2F-FF1E-0FE11EFA0CDB}"/>
+                <a16:creationId xmlns:a16="http://schemas.microsoft.com/office/drawing/2014/main" id="{EDF6BC8C-2392-3C91-D37A-982E4CC262E9}"/>
               </a:ext>
             </a:extLst>
           </p:cNvPr>
@@ -1615,7 +1615,7 @@
           <a:bodyPr/>
           <a:lstStyle/>
           <a:p>
-            <a:fld id="{8652984F-2DCF-4D3F-87FE-96960A49E255}" type="slidenum">
+            <a:fld id="{BD7739A3-EDF2-49D3-990C-7DE66E176CC4}" type="slidenum">
               <a:rPr kumimoji="1" lang="ja-JP" altLang="en-US" smtClean="0"/>
               <a:t>‹#›</a:t>
             </a:fld>
@@ -1626,7 +1626,7 @@
     </p:spTree>
     <p:extLst>
       <p:ext uri="{BB962C8B-B14F-4D97-AF65-F5344CB8AC3E}">
-        <p14:creationId xmlns:p14="http://schemas.microsoft.com/office/powerpoint/2010/main" val="1914684814"/>
+        <p14:creationId xmlns:p14="http://schemas.microsoft.com/office/powerpoint/2010/main" val="1860543029"/>
       </p:ext>
     </p:extLst>
   </p:cSld>
@@ -1658,7 +1658,7 @@
           <p:cNvPr id="2" name="タイトル 1">
             <a:extLst>
               <a:ext uri="{FF2B5EF4-FFF2-40B4-BE49-F238E27FC236}">
-                <a16:creationId xmlns:a16="http://schemas.microsoft.com/office/drawing/2014/main" id="{EF6C3F02-9F05-DD08-FD1D-35E0FEE82631}"/>
+                <a16:creationId xmlns:a16="http://schemas.microsoft.com/office/drawing/2014/main" id="{CFFC87AF-B9E5-9FCA-5295-942C9005886C}"/>
               </a:ext>
             </a:extLst>
           </p:cNvPr>
@@ -1691,7 +1691,7 @@
           <p:cNvPr id="3" name="テキスト プレースホルダー 2">
             <a:extLst>
               <a:ext uri="{FF2B5EF4-FFF2-40B4-BE49-F238E27FC236}">
-                <a16:creationId xmlns:a16="http://schemas.microsoft.com/office/drawing/2014/main" id="{7609B333-3512-4F41-970E-4533CA5C00CF}"/>
+                <a16:creationId xmlns:a16="http://schemas.microsoft.com/office/drawing/2014/main" id="{7678479D-CE38-51B6-C434-FA85B7E5102F}"/>
               </a:ext>
             </a:extLst>
           </p:cNvPr>
@@ -1762,7 +1762,7 @@
           <p:cNvPr id="4" name="コンテンツ プレースホルダー 3">
             <a:extLst>
               <a:ext uri="{FF2B5EF4-FFF2-40B4-BE49-F238E27FC236}">
-                <a16:creationId xmlns:a16="http://schemas.microsoft.com/office/drawing/2014/main" id="{97D23F22-8D16-D408-EEFB-469D1529C45A}"/>
+                <a16:creationId xmlns:a16="http://schemas.microsoft.com/office/drawing/2014/main" id="{7AA49DFE-F919-F1FB-23AB-AFF787C428BA}"/>
               </a:ext>
             </a:extLst>
           </p:cNvPr>
@@ -1856,7 +1856,7 @@
           <p:cNvPr id="5" name="テキスト プレースホルダー 4">
             <a:extLst>
               <a:ext uri="{FF2B5EF4-FFF2-40B4-BE49-F238E27FC236}">
-                <a16:creationId xmlns:a16="http://schemas.microsoft.com/office/drawing/2014/main" id="{185B6A0B-BB8C-40F9-F9FD-9DFDB371FC61}"/>
+                <a16:creationId xmlns:a16="http://schemas.microsoft.com/office/drawing/2014/main" id="{490C53AD-EA09-5A90-CE42-A4ED38A074AB}"/>
               </a:ext>
             </a:extLst>
           </p:cNvPr>
@@ -1927,7 +1927,7 @@
           <p:cNvPr id="6" name="コンテンツ プレースホルダー 5">
             <a:extLst>
               <a:ext uri="{FF2B5EF4-FFF2-40B4-BE49-F238E27FC236}">
-                <a16:creationId xmlns:a16="http://schemas.microsoft.com/office/drawing/2014/main" id="{954E7D7C-8A69-9808-DAC2-B467E63DD7F0}"/>
+                <a16:creationId xmlns:a16="http://schemas.microsoft.com/office/drawing/2014/main" id="{135F5112-D3E9-7B0A-C0F5-1F80958DCC0D}"/>
               </a:ext>
             </a:extLst>
           </p:cNvPr>
@@ -2021,7 +2021,7 @@
           <p:cNvPr id="7" name="日付プレースホルダー 6">
             <a:extLst>
               <a:ext uri="{FF2B5EF4-FFF2-40B4-BE49-F238E27FC236}">
-                <a16:creationId xmlns:a16="http://schemas.microsoft.com/office/drawing/2014/main" id="{D2E07558-C4D6-7E14-5531-A7EAB9DE7C71}"/>
+                <a16:creationId xmlns:a16="http://schemas.microsoft.com/office/drawing/2014/main" id="{94F28656-96CD-06D8-E171-4F8B98F6B09B}"/>
               </a:ext>
             </a:extLst>
           </p:cNvPr>
@@ -2037,7 +2037,7 @@
           <a:bodyPr/>
           <a:lstStyle/>
           <a:p>
-            <a:fld id="{84BE9DB3-D6E0-4A1E-8EE9-71F95B4242BD}" type="datetimeFigureOut">
+            <a:fld id="{C78859A6-1FE5-4288-BA83-4A670086B26A}" type="datetimeFigureOut">
               <a:rPr kumimoji="1" lang="ja-JP" altLang="en-US" smtClean="0"/>
               <a:t>2026/7/30</a:t>
             </a:fld>
@@ -2050,7 +2050,7 @@
           <p:cNvPr id="8" name="フッター プレースホルダー 7">
             <a:extLst>
               <a:ext uri="{FF2B5EF4-FFF2-40B4-BE49-F238E27FC236}">
-                <a16:creationId xmlns:a16="http://schemas.microsoft.com/office/drawing/2014/main" id="{F5C604D2-7124-BCCC-09A2-2C4F306E086B}"/>
+                <a16:creationId xmlns:a16="http://schemas.microsoft.com/office/drawing/2014/main" id="{8A5C9540-B0A8-8E9B-05EF-2DB3AC2AE5D2}"/>
               </a:ext>
             </a:extLst>
           </p:cNvPr>
@@ -2075,7 +2075,7 @@
           <p:cNvPr id="9" name="スライド番号プレースホルダー 8">
             <a:extLst>
               <a:ext uri="{FF2B5EF4-FFF2-40B4-BE49-F238E27FC236}">
-                <a16:creationId xmlns:a16="http://schemas.microsoft.com/office/drawing/2014/main" id="{680150A0-5B80-2DD9-0B5F-8958CF338DC9}"/>
+                <a16:creationId xmlns:a16="http://schemas.microsoft.com/office/drawing/2014/main" id="{59D82623-544F-2B78-4AC4-EB2D586101CC}"/>
               </a:ext>
             </a:extLst>
           </p:cNvPr>
@@ -2091,7 +2091,7 @@
           <a:bodyPr/>
           <a:lstStyle/>
           <a:p>
-            <a:fld id="{8652984F-2DCF-4D3F-87FE-96960A49E255}" type="slidenum">
+            <a:fld id="{BD7739A3-EDF2-49D3-990C-7DE66E176CC4}" type="slidenum">
               <a:rPr kumimoji="1" lang="ja-JP" altLang="en-US" smtClean="0"/>
               <a:t>‹#›</a:t>
             </a:fld>
@@ -2102,7 +2102,7 @@
     </p:spTree>
     <p:extLst>
       <p:ext uri="{BB962C8B-B14F-4D97-AF65-F5344CB8AC3E}">
-        <p14:creationId xmlns:p14="http://schemas.microsoft.com/office/powerpoint/2010/main" val="1381693033"/>
+        <p14:creationId xmlns:p14="http://schemas.microsoft.com/office/powerpoint/2010/main" val="209906367"/>
       </p:ext>
     </p:extLst>
   </p:cSld>
@@ -2134,7 +2134,7 @@
           <p:cNvPr id="2" name="タイトル 1">
             <a:extLst>
               <a:ext uri="{FF2B5EF4-FFF2-40B4-BE49-F238E27FC236}">
-                <a16:creationId xmlns:a16="http://schemas.microsoft.com/office/drawing/2014/main" id="{406DED9B-4276-0B17-471B-24843F3A3D83}"/>
+                <a16:creationId xmlns:a16="http://schemas.microsoft.com/office/drawing/2014/main" id="{45687B43-164A-5D4D-810B-577425E7D3AC}"/>
               </a:ext>
             </a:extLst>
           </p:cNvPr>
@@ -2162,7 +2162,7 @@
           <p:cNvPr id="3" name="日付プレースホルダー 2">
             <a:extLst>
               <a:ext uri="{FF2B5EF4-FFF2-40B4-BE49-F238E27FC236}">
-                <a16:creationId xmlns:a16="http://schemas.microsoft.com/office/drawing/2014/main" id="{6D598229-48EF-5075-2060-72A804FA5EB3}"/>
+                <a16:creationId xmlns:a16="http://schemas.microsoft.com/office/drawing/2014/main" id="{2813CC9B-82F8-B126-1421-456EA3F1753D}"/>
               </a:ext>
             </a:extLst>
           </p:cNvPr>
@@ -2178,7 +2178,7 @@
           <a:bodyPr/>
           <a:lstStyle/>
           <a:p>
-            <a:fld id="{84BE9DB3-D6E0-4A1E-8EE9-71F95B4242BD}" type="datetimeFigureOut">
+            <a:fld id="{C78859A6-1FE5-4288-BA83-4A670086B26A}" type="datetimeFigureOut">
               <a:rPr kumimoji="1" lang="ja-JP" altLang="en-US" smtClean="0"/>
               <a:t>2026/7/30</a:t>
             </a:fld>
@@ -2191,7 +2191,7 @@
           <p:cNvPr id="4" name="フッター プレースホルダー 3">
             <a:extLst>
               <a:ext uri="{FF2B5EF4-FFF2-40B4-BE49-F238E27FC236}">
-                <a16:creationId xmlns:a16="http://schemas.microsoft.com/office/drawing/2014/main" id="{3F43E584-CC3B-BC4C-2AFE-B148E5066AE8}"/>
+                <a16:creationId xmlns:a16="http://schemas.microsoft.com/office/drawing/2014/main" id="{493D3CDE-E152-ACC3-1AAC-3175B43CF982}"/>
               </a:ext>
             </a:extLst>
           </p:cNvPr>
@@ -2216,7 +2216,7 @@
           <p:cNvPr id="5" name="スライド番号プレースホルダー 4">
             <a:extLst>
               <a:ext uri="{FF2B5EF4-FFF2-40B4-BE49-F238E27FC236}">
-                <a16:creationId xmlns:a16="http://schemas.microsoft.com/office/drawing/2014/main" id="{36DA8960-F309-5364-C833-10B68634F726}"/>
+                <a16:creationId xmlns:a16="http://schemas.microsoft.com/office/drawing/2014/main" id="{79BDDA55-C879-1F73-4DC7-23F2B427D840}"/>
               </a:ext>
             </a:extLst>
           </p:cNvPr>
@@ -2232,7 +2232,7 @@
           <a:bodyPr/>
           <a:lstStyle/>
           <a:p>
-            <a:fld id="{8652984F-2DCF-4D3F-87FE-96960A49E255}" type="slidenum">
+            <a:fld id="{BD7739A3-EDF2-49D3-990C-7DE66E176CC4}" type="slidenum">
               <a:rPr kumimoji="1" lang="ja-JP" altLang="en-US" smtClean="0"/>
               <a:t>‹#›</a:t>
             </a:fld>
@@ -2243,7 +2243,7 @@
     </p:spTree>
     <p:extLst>
       <p:ext uri="{BB962C8B-B14F-4D97-AF65-F5344CB8AC3E}">
-        <p14:creationId xmlns:p14="http://schemas.microsoft.com/office/powerpoint/2010/main" val="4219114879"/>
+        <p14:creationId xmlns:p14="http://schemas.microsoft.com/office/powerpoint/2010/main" val="269440589"/>
       </p:ext>
     </p:extLst>
   </p:cSld>
@@ -2275,7 +2275,7 @@
           <p:cNvPr id="2" name="日付プレースホルダー 1">
             <a:extLst>
               <a:ext uri="{FF2B5EF4-FFF2-40B4-BE49-F238E27FC236}">
-                <a16:creationId xmlns:a16="http://schemas.microsoft.com/office/drawing/2014/main" id="{A914DFE6-4C52-4292-62A4-95B359FF1FFD}"/>
+                <a16:creationId xmlns:a16="http://schemas.microsoft.com/office/drawing/2014/main" id="{DFBC4E27-117F-AFCC-74B5-722C9802A53C}"/>
               </a:ext>
             </a:extLst>
           </p:cNvPr>
@@ -2291,7 +2291,7 @@
           <a:bodyPr/>
           <a:lstStyle/>
           <a:p>
-            <a:fld id="{84BE9DB3-D6E0-4A1E-8EE9-71F95B4242BD}" type="datetimeFigureOut">
+            <a:fld id="{C78859A6-1FE5-4288-BA83-4A670086B26A}" type="datetimeFigureOut">
               <a:rPr kumimoji="1" lang="ja-JP" altLang="en-US" smtClean="0"/>
               <a:t>2026/7/30</a:t>
             </a:fld>
@@ -2304,7 +2304,7 @@
           <p:cNvPr id="3" name="フッター プレースホルダー 2">
             <a:extLst>
               <a:ext uri="{FF2B5EF4-FFF2-40B4-BE49-F238E27FC236}">
-                <a16:creationId xmlns:a16="http://schemas.microsoft.com/office/drawing/2014/main" id="{1D5CC2FD-4278-BFAF-57D0-09F1CBAE98B9}"/>
+                <a16:creationId xmlns:a16="http://schemas.microsoft.com/office/drawing/2014/main" id="{7EA9AF80-D094-F549-B0F5-B017123C7A09}"/>
               </a:ext>
             </a:extLst>
           </p:cNvPr>
@@ -2329,7 +2329,7 @@
           <p:cNvPr id="4" name="スライド番号プレースホルダー 3">
             <a:extLst>
               <a:ext uri="{FF2B5EF4-FFF2-40B4-BE49-F238E27FC236}">
-                <a16:creationId xmlns:a16="http://schemas.microsoft.com/office/drawing/2014/main" id="{0CFCFB31-516C-72DB-68E2-81BDB2EB00E9}"/>
+                <a16:creationId xmlns:a16="http://schemas.microsoft.com/office/drawing/2014/main" id="{A5388FBF-4850-D667-9CA5-498B048DC1E1}"/>
               </a:ext>
             </a:extLst>
           </p:cNvPr>
@@ -2345,7 +2345,7 @@
           <a:bodyPr/>
           <a:lstStyle/>
           <a:p>
-            <a:fld id="{8652984F-2DCF-4D3F-87FE-96960A49E255}" type="slidenum">
+            <a:fld id="{BD7739A3-EDF2-49D3-990C-7DE66E176CC4}" type="slidenum">
               <a:rPr kumimoji="1" lang="ja-JP" altLang="en-US" smtClean="0"/>
               <a:t>‹#›</a:t>
             </a:fld>
@@ -2356,7 +2356,7 @@
     </p:spTree>
     <p:extLst>
       <p:ext uri="{BB962C8B-B14F-4D97-AF65-F5344CB8AC3E}">
-        <p14:creationId xmlns:p14="http://schemas.microsoft.com/office/powerpoint/2010/main" val="2281042536"/>
+        <p14:creationId xmlns:p14="http://schemas.microsoft.com/office/powerpoint/2010/main" val="1242083733"/>
       </p:ext>
     </p:extLst>
   </p:cSld>
@@ -2388,7 +2388,7 @@
           <p:cNvPr id="2" name="タイトル 1">
             <a:extLst>
               <a:ext uri="{FF2B5EF4-FFF2-40B4-BE49-F238E27FC236}">
-                <a16:creationId xmlns:a16="http://schemas.microsoft.com/office/drawing/2014/main" id="{2BC66034-CFC0-5EC1-7C16-94E22C652E2E}"/>
+                <a16:creationId xmlns:a16="http://schemas.microsoft.com/office/drawing/2014/main" id="{46DDD5E2-5A3F-75DA-C5BD-5647413CA813}"/>
               </a:ext>
             </a:extLst>
           </p:cNvPr>
@@ -2425,7 +2425,7 @@
           <p:cNvPr id="3" name="コンテンツ プレースホルダー 2">
             <a:extLst>
               <a:ext uri="{FF2B5EF4-FFF2-40B4-BE49-F238E27FC236}">
-                <a16:creationId xmlns:a16="http://schemas.microsoft.com/office/drawing/2014/main" id="{94ADEECE-00FB-03B6-DE09-2B8EC13A8347}"/>
+                <a16:creationId xmlns:a16="http://schemas.microsoft.com/office/drawing/2014/main" id="{233A801E-9030-D31E-16EE-65C17D789E6D}"/>
               </a:ext>
             </a:extLst>
           </p:cNvPr>
@@ -2547,7 +2547,7 @@
           <p:cNvPr id="4" name="テキスト プレースホルダー 3">
             <a:extLst>
               <a:ext uri="{FF2B5EF4-FFF2-40B4-BE49-F238E27FC236}">
-                <a16:creationId xmlns:a16="http://schemas.microsoft.com/office/drawing/2014/main" id="{6ED29F31-784B-E76B-8EB3-BB476706899E}"/>
+                <a16:creationId xmlns:a16="http://schemas.microsoft.com/office/drawing/2014/main" id="{A1E602CF-95CC-488B-E533-A1BE9F6882ED}"/>
               </a:ext>
             </a:extLst>
           </p:cNvPr>
@@ -2618,7 +2618,7 @@
           <p:cNvPr id="5" name="日付プレースホルダー 4">
             <a:extLst>
               <a:ext uri="{FF2B5EF4-FFF2-40B4-BE49-F238E27FC236}">
-                <a16:creationId xmlns:a16="http://schemas.microsoft.com/office/drawing/2014/main" id="{A730D6DC-7914-751D-2F21-BB9D96F644D8}"/>
+                <a16:creationId xmlns:a16="http://schemas.microsoft.com/office/drawing/2014/main" id="{4048FA7B-40C4-6C34-67EC-CFE8DB364797}"/>
               </a:ext>
             </a:extLst>
           </p:cNvPr>
@@ -2634,7 +2634,7 @@
           <a:bodyPr/>
           <a:lstStyle/>
           <a:p>
-            <a:fld id="{84BE9DB3-D6E0-4A1E-8EE9-71F95B4242BD}" type="datetimeFigureOut">
+            <a:fld id="{C78859A6-1FE5-4288-BA83-4A670086B26A}" type="datetimeFigureOut">
               <a:rPr kumimoji="1" lang="ja-JP" altLang="en-US" smtClean="0"/>
               <a:t>2026/7/30</a:t>
             </a:fld>
@@ -2647,7 +2647,7 @@
           <p:cNvPr id="6" name="フッター プレースホルダー 5">
             <a:extLst>
               <a:ext uri="{FF2B5EF4-FFF2-40B4-BE49-F238E27FC236}">
-                <a16:creationId xmlns:a16="http://schemas.microsoft.com/office/drawing/2014/main" id="{1E23E3B8-B763-39C6-03E6-E6AC38408019}"/>
+                <a16:creationId xmlns:a16="http://schemas.microsoft.com/office/drawing/2014/main" id="{56853A4D-7163-9E6C-9EA0-96E164D7C516}"/>
               </a:ext>
             </a:extLst>
           </p:cNvPr>
@@ -2672,7 +2672,7 @@
           <p:cNvPr id="7" name="スライド番号プレースホルダー 6">
             <a:extLst>
               <a:ext uri="{FF2B5EF4-FFF2-40B4-BE49-F238E27FC236}">
-                <a16:creationId xmlns:a16="http://schemas.microsoft.com/office/drawing/2014/main" id="{013A1CA5-0C52-B817-473A-413DAF0F5284}"/>
+                <a16:creationId xmlns:a16="http://schemas.microsoft.com/office/drawing/2014/main" id="{A8E826DF-2F2D-73D2-EA25-88B55EDE98FF}"/>
               </a:ext>
             </a:extLst>
           </p:cNvPr>
@@ -2688,7 +2688,7 @@
           <a:bodyPr/>
           <a:lstStyle/>
           <a:p>
-            <a:fld id="{8652984F-2DCF-4D3F-87FE-96960A49E255}" type="slidenum">
+            <a:fld id="{BD7739A3-EDF2-49D3-990C-7DE66E176CC4}" type="slidenum">
               <a:rPr kumimoji="1" lang="ja-JP" altLang="en-US" smtClean="0"/>
               <a:t>‹#›</a:t>
             </a:fld>
@@ -2699,7 +2699,7 @@
     </p:spTree>
     <p:extLst>
       <p:ext uri="{BB962C8B-B14F-4D97-AF65-F5344CB8AC3E}">
-        <p14:creationId xmlns:p14="http://schemas.microsoft.com/office/powerpoint/2010/main" val="2822742706"/>
+        <p14:creationId xmlns:p14="http://schemas.microsoft.com/office/powerpoint/2010/main" val="2260177914"/>
       </p:ext>
     </p:extLst>
   </p:cSld>
@@ -2731,7 +2731,7 @@
           <p:cNvPr id="2" name="タイトル 1">
             <a:extLst>
               <a:ext uri="{FF2B5EF4-FFF2-40B4-BE49-F238E27FC236}">
-                <a16:creationId xmlns:a16="http://schemas.microsoft.com/office/drawing/2014/main" id="{14992E9D-753B-B40C-7817-BA17A632FCB7}"/>
+                <a16:creationId xmlns:a16="http://schemas.microsoft.com/office/drawing/2014/main" id="{53169634-8CB4-A640-635D-BEECB5326391}"/>
               </a:ext>
             </a:extLst>
           </p:cNvPr>
@@ -2768,7 +2768,7 @@
           <p:cNvPr id="3" name="図プレースホルダー 2">
             <a:extLst>
               <a:ext uri="{FF2B5EF4-FFF2-40B4-BE49-F238E27FC236}">
-                <a16:creationId xmlns:a16="http://schemas.microsoft.com/office/drawing/2014/main" id="{0D3142B0-204F-C1CF-0B31-6EF80EC54BF1}"/>
+                <a16:creationId xmlns:a16="http://schemas.microsoft.com/office/drawing/2014/main" id="{A9E3028D-1213-E07D-395A-D03507D3E9FB}"/>
               </a:ext>
             </a:extLst>
           </p:cNvPr>
@@ -2835,7 +2835,7 @@
           <p:cNvPr id="4" name="テキスト プレースホルダー 3">
             <a:extLst>
               <a:ext uri="{FF2B5EF4-FFF2-40B4-BE49-F238E27FC236}">
-                <a16:creationId xmlns:a16="http://schemas.microsoft.com/office/drawing/2014/main" id="{EE3FE3BD-D80D-44A8-F3A0-5647AB569A79}"/>
+                <a16:creationId xmlns:a16="http://schemas.microsoft.com/office/drawing/2014/main" id="{32D3F67E-54B7-488C-3A44-31172EFD214A}"/>
               </a:ext>
             </a:extLst>
           </p:cNvPr>
@@ -2906,7 +2906,7 @@
           <p:cNvPr id="5" name="日付プレースホルダー 4">
             <a:extLst>
               <a:ext uri="{FF2B5EF4-FFF2-40B4-BE49-F238E27FC236}">
-                <a16:creationId xmlns:a16="http://schemas.microsoft.com/office/drawing/2014/main" id="{C0A6FC7D-66A4-679F-47AF-9DB02109BD3B}"/>
+                <a16:creationId xmlns:a16="http://schemas.microsoft.com/office/drawing/2014/main" id="{6C6692C6-4B1A-1761-7192-6F9963F37165}"/>
               </a:ext>
             </a:extLst>
           </p:cNvPr>
@@ -2922,7 +2922,7 @@
           <a:bodyPr/>
           <a:lstStyle/>
           <a:p>
-            <a:fld id="{84BE9DB3-D6E0-4A1E-8EE9-71F95B4242BD}" type="datetimeFigureOut">
+            <a:fld id="{C78859A6-1FE5-4288-BA83-4A670086B26A}" type="datetimeFigureOut">
               <a:rPr kumimoji="1" lang="ja-JP" altLang="en-US" smtClean="0"/>
               <a:t>2026/7/30</a:t>
             </a:fld>
@@ -2935,7 +2935,7 @@
           <p:cNvPr id="6" name="フッター プレースホルダー 5">
             <a:extLst>
               <a:ext uri="{FF2B5EF4-FFF2-40B4-BE49-F238E27FC236}">
-                <a16:creationId xmlns:a16="http://schemas.microsoft.com/office/drawing/2014/main" id="{A9709335-CC84-0509-E940-2D1C99933019}"/>
+                <a16:creationId xmlns:a16="http://schemas.microsoft.com/office/drawing/2014/main" id="{4E4B6A8B-B9F2-02F9-96AE-228AB6330792}"/>
               </a:ext>
             </a:extLst>
           </p:cNvPr>
@@ -2960,7 +2960,7 @@
           <p:cNvPr id="7" name="スライド番号プレースホルダー 6">
             <a:extLst>
               <a:ext uri="{FF2B5EF4-FFF2-40B4-BE49-F238E27FC236}">
-                <a16:creationId xmlns:a16="http://schemas.microsoft.com/office/drawing/2014/main" id="{A947AC71-E80B-5F81-087C-22B12AA12F8A}"/>
+                <a16:creationId xmlns:a16="http://schemas.microsoft.com/office/drawing/2014/main" id="{FE5C8C0E-0CEC-58AD-CAAD-7C405DEC8685}"/>
               </a:ext>
             </a:extLst>
           </p:cNvPr>
@@ -2976,7 +2976,7 @@
           <a:bodyPr/>
           <a:lstStyle/>
           <a:p>
-            <a:fld id="{8652984F-2DCF-4D3F-87FE-96960A49E255}" type="slidenum">
+            <a:fld id="{BD7739A3-EDF2-49D3-990C-7DE66E176CC4}" type="slidenum">
               <a:rPr kumimoji="1" lang="ja-JP" altLang="en-US" smtClean="0"/>
               <a:t>‹#›</a:t>
             </a:fld>
@@ -2987,7 +2987,7 @@
     </p:spTree>
     <p:extLst>
       <p:ext uri="{BB962C8B-B14F-4D97-AF65-F5344CB8AC3E}">
-        <p14:creationId xmlns:p14="http://schemas.microsoft.com/office/powerpoint/2010/main" val="551955168"/>
+        <p14:creationId xmlns:p14="http://schemas.microsoft.com/office/powerpoint/2010/main" val="3694417067"/>
       </p:ext>
     </p:extLst>
   </p:cSld>
@@ -3024,7 +3024,7 @@
           <p:cNvPr id="2" name="タイトル プレースホルダー 1">
             <a:extLst>
               <a:ext uri="{FF2B5EF4-FFF2-40B4-BE49-F238E27FC236}">
-                <a16:creationId xmlns:a16="http://schemas.microsoft.com/office/drawing/2014/main" id="{294AEAB5-C738-74B6-CE7F-AAC82EEBAA06}"/>
+                <a16:creationId xmlns:a16="http://schemas.microsoft.com/office/drawing/2014/main" id="{632A831C-E678-8E1C-429D-C8445737D547}"/>
               </a:ext>
             </a:extLst>
           </p:cNvPr>
@@ -3062,7 +3062,7 @@
           <p:cNvPr id="3" name="テキスト プレースホルダー 2">
             <a:extLst>
               <a:ext uri="{FF2B5EF4-FFF2-40B4-BE49-F238E27FC236}">
-                <a16:creationId xmlns:a16="http://schemas.microsoft.com/office/drawing/2014/main" id="{142E63D7-4E4F-6653-B5EB-7A865A9F6BE2}"/>
+                <a16:creationId xmlns:a16="http://schemas.microsoft.com/office/drawing/2014/main" id="{35B8A55E-B8F2-EB0B-100A-D8F475DBBF82}"/>
               </a:ext>
             </a:extLst>
           </p:cNvPr>
@@ -3161,7 +3161,7 @@
           <p:cNvPr id="4" name="日付プレースホルダー 3">
             <a:extLst>
               <a:ext uri="{FF2B5EF4-FFF2-40B4-BE49-F238E27FC236}">
-                <a16:creationId xmlns:a16="http://schemas.microsoft.com/office/drawing/2014/main" id="{9F35423D-5407-C2DA-AED5-8F00CED62C67}"/>
+                <a16:creationId xmlns:a16="http://schemas.microsoft.com/office/drawing/2014/main" id="{CE8AB2CF-FBC2-0662-8A1A-2ABF6A14D2E0}"/>
               </a:ext>
             </a:extLst>
           </p:cNvPr>
@@ -3195,7 +3195,7 @@
             </a:lvl1pPr>
           </a:lstStyle>
           <a:p>
-            <a:fld id="{84BE9DB3-D6E0-4A1E-8EE9-71F95B4242BD}" type="datetimeFigureOut">
+            <a:fld id="{C78859A6-1FE5-4288-BA83-4A670086B26A}" type="datetimeFigureOut">
               <a:rPr kumimoji="1" lang="ja-JP" altLang="en-US" smtClean="0"/>
               <a:t>2026/7/30</a:t>
             </a:fld>
@@ -3208,7 +3208,7 @@
           <p:cNvPr id="5" name="フッター プレースホルダー 4">
             <a:extLst>
               <a:ext uri="{FF2B5EF4-FFF2-40B4-BE49-F238E27FC236}">
-                <a16:creationId xmlns:a16="http://schemas.microsoft.com/office/drawing/2014/main" id="{87071E94-3C07-B872-1663-C7E47E103238}"/>
+                <a16:creationId xmlns:a16="http://schemas.microsoft.com/office/drawing/2014/main" id="{5294562F-7585-1560-BA0F-A58176927D29}"/>
               </a:ext>
             </a:extLst>
           </p:cNvPr>
@@ -3251,7 +3251,7 @@
           <p:cNvPr id="6" name="スライド番号プレースホルダー 5">
             <a:extLst>
               <a:ext uri="{FF2B5EF4-FFF2-40B4-BE49-F238E27FC236}">
-                <a16:creationId xmlns:a16="http://schemas.microsoft.com/office/drawing/2014/main" id="{56D32565-FAD7-B3BD-9B00-E5CF0B9E4D64}"/>
+                <a16:creationId xmlns:a16="http://schemas.microsoft.com/office/drawing/2014/main" id="{81A51191-1EDA-8F11-78E3-75D0A120AE9E}"/>
               </a:ext>
             </a:extLst>
           </p:cNvPr>
@@ -3285,7 +3285,7 @@
             </a:lvl1pPr>
           </a:lstStyle>
           <a:p>
-            <a:fld id="{8652984F-2DCF-4D3F-87FE-96960A49E255}" type="slidenum">
+            <a:fld id="{BD7739A3-EDF2-49D3-990C-7DE66E176CC4}" type="slidenum">
               <a:rPr kumimoji="1" lang="ja-JP" altLang="en-US" smtClean="0"/>
               <a:t>‹#›</a:t>
             </a:fld>
@@ -3296,7 +3296,7 @@
     </p:spTree>
     <p:extLst>
       <p:ext uri="{BB962C8B-B14F-4D97-AF65-F5344CB8AC3E}">
-        <p14:creationId xmlns:p14="http://schemas.microsoft.com/office/powerpoint/2010/main" val="2425553075"/>
+        <p14:creationId xmlns:p14="http://schemas.microsoft.com/office/powerpoint/2010/main" val="1257211248"/>
       </p:ext>
     </p:extLst>
   </p:cSld>
@@ -3619,7 +3619,7 @@
           <p:cNvPr id="2" name="テキスト ボックス 1">
             <a:extLst>
               <a:ext uri="{FF2B5EF4-FFF2-40B4-BE49-F238E27FC236}">
-                <a16:creationId xmlns:a16="http://schemas.microsoft.com/office/drawing/2014/main" id="{3C5F092F-2AF3-6FDD-962A-3DF99FFCD1BF}"/>
+                <a16:creationId xmlns:a16="http://schemas.microsoft.com/office/drawing/2014/main" id="{65029580-4985-582D-1B11-E5AC0D9510C8}"/>
               </a:ext>
             </a:extLst>
           </p:cNvPr>
@@ -3665,7 +3665,7 @@
           <p:cNvPr id="3" name="テキスト ボックス 2">
             <a:extLst>
               <a:ext uri="{FF2B5EF4-FFF2-40B4-BE49-F238E27FC236}">
-                <a16:creationId xmlns:a16="http://schemas.microsoft.com/office/drawing/2014/main" id="{467A1B8A-5998-19AC-CAF0-DD80AB513615}"/>
+                <a16:creationId xmlns:a16="http://schemas.microsoft.com/office/drawing/2014/main" id="{98DED55A-E906-FA45-5698-80B681FC077E}"/>
               </a:ext>
             </a:extLst>
           </p:cNvPr>
@@ -3714,7 +3714,7 @@
           <p:cNvPr id="4" name="テキスト ボックス 3">
             <a:extLst>
               <a:ext uri="{FF2B5EF4-FFF2-40B4-BE49-F238E27FC236}">
-                <a16:creationId xmlns:a16="http://schemas.microsoft.com/office/drawing/2014/main" id="{4692FAB0-D259-D126-6B56-79F29E749ACD}"/>
+                <a16:creationId xmlns:a16="http://schemas.microsoft.com/office/drawing/2014/main" id="{5E7300C2-60CF-7620-C6DD-3BC4E2888BF7}"/>
               </a:ext>
             </a:extLst>
           </p:cNvPr>
@@ -3754,7 +3754,7 @@
           <p:cNvPr id="5" name="テキスト ボックス 4">
             <a:extLst>
               <a:ext uri="{FF2B5EF4-FFF2-40B4-BE49-F238E27FC236}">
-                <a16:creationId xmlns:a16="http://schemas.microsoft.com/office/drawing/2014/main" id="{E6F940F5-F877-987F-3D3A-1897641FB2FD}"/>
+                <a16:creationId xmlns:a16="http://schemas.microsoft.com/office/drawing/2014/main" id="{02E9995A-FDED-4D16-BF76-80820A57E7FD}"/>
               </a:ext>
             </a:extLst>
           </p:cNvPr>
@@ -3801,7 +3801,7 @@
             <a:hlinkClick r:id="" action="ppaction://media"/>
             <a:extLst>
               <a:ext uri="{FF2B5EF4-FFF2-40B4-BE49-F238E27FC236}">
-                <a16:creationId xmlns:a16="http://schemas.microsoft.com/office/drawing/2014/main" id="{A29E2CB4-C419-8E6D-1760-8CF9A1BFB4C5}"/>
+                <a16:creationId xmlns:a16="http://schemas.microsoft.com/office/drawing/2014/main" id="{D9675C87-7E90-351C-A5FB-A84E1619BCBE}"/>
               </a:ext>
             </a:extLst>
           </p:cNvPr>
@@ -3836,7 +3836,7 @@
     </p:spTree>
     <p:extLst>
       <p:ext uri="{BB962C8B-B14F-4D97-AF65-F5344CB8AC3E}">
-        <p14:creationId xmlns:p14="http://schemas.microsoft.com/office/powerpoint/2010/main" val="3628475587"/>
+        <p14:creationId xmlns:p14="http://schemas.microsoft.com/office/powerpoint/2010/main" val="2690161191"/>
       </p:ext>
     </p:extLst>
   </p:cSld>
@@ -3960,7 +3960,7 @@
           <p:cNvPr id="2" name="テキスト ボックス 1">
             <a:extLst>
               <a:ext uri="{FF2B5EF4-FFF2-40B4-BE49-F238E27FC236}">
-                <a16:creationId xmlns:a16="http://schemas.microsoft.com/office/drawing/2014/main" id="{7F803207-29EC-27EC-1FBD-C9B3D5939DA3}"/>
+                <a16:creationId xmlns:a16="http://schemas.microsoft.com/office/drawing/2014/main" id="{C4DB4CD7-337C-08CF-2662-3709670766DF}"/>
               </a:ext>
             </a:extLst>
           </p:cNvPr>
@@ -4006,7 +4006,7 @@
           <p:cNvPr id="3" name="テキスト ボックス 2">
             <a:extLst>
               <a:ext uri="{FF2B5EF4-FFF2-40B4-BE49-F238E27FC236}">
-                <a16:creationId xmlns:a16="http://schemas.microsoft.com/office/drawing/2014/main" id="{54F71460-B659-4FD0-35C3-DC398DB0EB11}"/>
+                <a16:creationId xmlns:a16="http://schemas.microsoft.com/office/drawing/2014/main" id="{D2860261-BEAA-A160-3C71-404C4084FE86}"/>
               </a:ext>
             </a:extLst>
           </p:cNvPr>
@@ -4046,7 +4046,7 @@
           <p:cNvPr id="4" name="テキスト ボックス 3">
             <a:extLst>
               <a:ext uri="{FF2B5EF4-FFF2-40B4-BE49-F238E27FC236}">
-                <a16:creationId xmlns:a16="http://schemas.microsoft.com/office/drawing/2014/main" id="{2B2B98E7-47C2-0230-7C6C-6430D4D377AF}"/>
+                <a16:creationId xmlns:a16="http://schemas.microsoft.com/office/drawing/2014/main" id="{E5ACB0C9-F26E-0D08-3A81-138D9C75DEB2}"/>
               </a:ext>
             </a:extLst>
           </p:cNvPr>
@@ -4076,14 +4076,17 @@
                 </a:solidFill>
                 <a:latin typeface="Arial" panose="020B0604020202020204" pitchFamily="34" charset="0"/>
               </a:rPr>
-              <a:t>About Laravel Laravel is a web application framework with expressive, elegant syntax</a:t>
-            </a:r>
-            <a:endParaRPr kumimoji="1" lang="ja-JP" altLang="en-US" sz="2000">
-              <a:solidFill>
-                <a:srgbClr val="333333"/>
-              </a:solidFill>
-              <a:latin typeface="Arial" panose="020B0604020202020204" pitchFamily="34" charset="0"/>
-            </a:endParaRPr>
+              <a:t>Sauna Map</a:t>
+            </a:r>
+            <a:r>
+              <a:rPr kumimoji="1" lang="ja-JP" altLang="en-US" sz="2000">
+                <a:solidFill>
+                  <a:srgbClr val="333333"/>
+                </a:solidFill>
+                <a:latin typeface="Arial" panose="020B0604020202020204" pitchFamily="34" charset="0"/>
+              </a:rPr>
+              <a:t>の目的、構成、実装を公開コードから確認できるプロジェクトです。</a:t>
+            </a:r>
           </a:p>
         </p:txBody>
       </p:sp>
@@ -4092,7 +4095,7 @@
           <p:cNvPr id="5" name="テキスト ボックス 4">
             <a:extLst>
               <a:ext uri="{FF2B5EF4-FFF2-40B4-BE49-F238E27FC236}">
-                <a16:creationId xmlns:a16="http://schemas.microsoft.com/office/drawing/2014/main" id="{7FDD2C1B-4341-74D2-1FEE-5FCB07E29A84}"/>
+                <a16:creationId xmlns:a16="http://schemas.microsoft.com/office/drawing/2014/main" id="{5A0F2EC4-2249-978A-AD36-5853C3DA9DB1}"/>
               </a:ext>
             </a:extLst>
           </p:cNvPr>
@@ -4139,7 +4142,7 @@
             <a:hlinkClick r:id="" action="ppaction://media"/>
             <a:extLst>
               <a:ext uri="{FF2B5EF4-FFF2-40B4-BE49-F238E27FC236}">
-                <a16:creationId xmlns:a16="http://schemas.microsoft.com/office/drawing/2014/main" id="{F61DF501-6839-AA9D-4F9B-4485B95EC67C}"/>
+                <a16:creationId xmlns:a16="http://schemas.microsoft.com/office/drawing/2014/main" id="{B12E99F7-6F03-3EB4-BF56-4CC2A8A72A06}"/>
               </a:ext>
             </a:extLst>
           </p:cNvPr>
@@ -4174,7 +4177,7 @@
     </p:spTree>
     <p:extLst>
       <p:ext uri="{BB962C8B-B14F-4D97-AF65-F5344CB8AC3E}">
-        <p14:creationId xmlns:p14="http://schemas.microsoft.com/office/powerpoint/2010/main" val="3651401944"/>
+        <p14:creationId xmlns:p14="http://schemas.microsoft.com/office/powerpoint/2010/main" val="851390538"/>
       </p:ext>
     </p:extLst>
   </p:cSld>
@@ -4217,7 +4220,7 @@
                                   <p:childTnLst>
                                     <p:cmd type="call" cmd="playFrom(0.0)">
                                       <p:cBhvr>
-                                        <p:cTn id="6" dur="7780" fill="hold"/>
+                                        <p:cTn id="6" dur="7016" fill="hold"/>
                                         <p:tgtEl>
                                           <p:spTgt spid="6"/>
                                         </p:tgtEl>
@@ -4298,7 +4301,7 @@
           <p:cNvPr id="2" name="テキスト ボックス 1">
             <a:extLst>
               <a:ext uri="{FF2B5EF4-FFF2-40B4-BE49-F238E27FC236}">
-                <a16:creationId xmlns:a16="http://schemas.microsoft.com/office/drawing/2014/main" id="{7A883DEF-C744-498B-CC71-F936F19B9C22}"/>
+                <a16:creationId xmlns:a16="http://schemas.microsoft.com/office/drawing/2014/main" id="{E3186A28-44D8-E67E-E709-049EAC2CDA61}"/>
               </a:ext>
             </a:extLst>
           </p:cNvPr>
@@ -4344,7 +4347,7 @@
           <p:cNvPr id="3" name="テキスト ボックス 2">
             <a:extLst>
               <a:ext uri="{FF2B5EF4-FFF2-40B4-BE49-F238E27FC236}">
-                <a16:creationId xmlns:a16="http://schemas.microsoft.com/office/drawing/2014/main" id="{903AC3CE-A007-7075-EFC0-5AF276519167}"/>
+                <a16:creationId xmlns:a16="http://schemas.microsoft.com/office/drawing/2014/main" id="{9F2568C4-BC75-D59A-CEBF-E60F80CC4482}"/>
               </a:ext>
             </a:extLst>
           </p:cNvPr>
@@ -4384,7 +4387,7 @@
           <p:cNvPr id="4" name="テキスト ボックス 3">
             <a:extLst>
               <a:ext uri="{FF2B5EF4-FFF2-40B4-BE49-F238E27FC236}">
-                <a16:creationId xmlns:a16="http://schemas.microsoft.com/office/drawing/2014/main" id="{E7739454-75F3-662D-C52D-7602AF6659A7}"/>
+                <a16:creationId xmlns:a16="http://schemas.microsoft.com/office/drawing/2014/main" id="{01C9AB6B-E99E-5B21-354F-6F4F6526179F}"/>
               </a:ext>
             </a:extLst>
           </p:cNvPr>
@@ -4497,7 +4500,7 @@
           <p:cNvPr id="5" name="テキスト ボックス 4">
             <a:extLst>
               <a:ext uri="{FF2B5EF4-FFF2-40B4-BE49-F238E27FC236}">
-                <a16:creationId xmlns:a16="http://schemas.microsoft.com/office/drawing/2014/main" id="{966723B7-9373-B468-F7D5-B31F1AF7E421}"/>
+                <a16:creationId xmlns:a16="http://schemas.microsoft.com/office/drawing/2014/main" id="{C6F08AFE-BCC4-E17B-6404-0D847552162B}"/>
               </a:ext>
             </a:extLst>
           </p:cNvPr>
@@ -4544,7 +4547,7 @@
             <a:hlinkClick r:id="" action="ppaction://media"/>
             <a:extLst>
               <a:ext uri="{FF2B5EF4-FFF2-40B4-BE49-F238E27FC236}">
-                <a16:creationId xmlns:a16="http://schemas.microsoft.com/office/drawing/2014/main" id="{B48D9719-7BEC-3D71-5F27-F45981AB5F2F}"/>
+                <a16:creationId xmlns:a16="http://schemas.microsoft.com/office/drawing/2014/main" id="{AD5726C6-900B-4D23-2422-4E09AD9DEBEA}"/>
               </a:ext>
             </a:extLst>
           </p:cNvPr>
@@ -4579,7 +4582,7 @@
     </p:spTree>
     <p:extLst>
       <p:ext uri="{BB962C8B-B14F-4D97-AF65-F5344CB8AC3E}">
-        <p14:creationId xmlns:p14="http://schemas.microsoft.com/office/powerpoint/2010/main" val="988495568"/>
+        <p14:creationId xmlns:p14="http://schemas.microsoft.com/office/powerpoint/2010/main" val="3772746716"/>
       </p:ext>
     </p:extLst>
   </p:cSld>
@@ -4703,7 +4706,7 @@
           <p:cNvPr id="2" name="テキスト ボックス 1">
             <a:extLst>
               <a:ext uri="{FF2B5EF4-FFF2-40B4-BE49-F238E27FC236}">
-                <a16:creationId xmlns:a16="http://schemas.microsoft.com/office/drawing/2014/main" id="{9DEA1352-2F88-F9F9-5059-9B7D112D65CC}"/>
+                <a16:creationId xmlns:a16="http://schemas.microsoft.com/office/drawing/2014/main" id="{7E356840-328C-AA38-7058-AAA7B412646C}"/>
               </a:ext>
             </a:extLst>
           </p:cNvPr>
@@ -4749,7 +4752,7 @@
           <p:cNvPr id="3" name="テキスト ボックス 2">
             <a:extLst>
               <a:ext uri="{FF2B5EF4-FFF2-40B4-BE49-F238E27FC236}">
-                <a16:creationId xmlns:a16="http://schemas.microsoft.com/office/drawing/2014/main" id="{78ECDAB2-48D5-3B90-14E6-8F2513C82776}"/>
+                <a16:creationId xmlns:a16="http://schemas.microsoft.com/office/drawing/2014/main" id="{F9D6ADCC-5DDA-ECDF-FBBD-0A6B3DF961E3}"/>
               </a:ext>
             </a:extLst>
           </p:cNvPr>
@@ -4789,7 +4792,7 @@
           <p:cNvPr id="4" name="テキスト ボックス 3">
             <a:extLst>
               <a:ext uri="{FF2B5EF4-FFF2-40B4-BE49-F238E27FC236}">
-                <a16:creationId xmlns:a16="http://schemas.microsoft.com/office/drawing/2014/main" id="{57BF2437-18CD-68FE-BE3A-2CF1E7FEDF19}"/>
+                <a16:creationId xmlns:a16="http://schemas.microsoft.com/office/drawing/2014/main" id="{2C00EE7D-7748-5763-BEC7-1430FADD3A4C}"/>
               </a:ext>
             </a:extLst>
           </p:cNvPr>
@@ -4899,7 +4902,7 @@
           <p:cNvPr id="5" name="テキスト ボックス 4">
             <a:extLst>
               <a:ext uri="{FF2B5EF4-FFF2-40B4-BE49-F238E27FC236}">
-                <a16:creationId xmlns:a16="http://schemas.microsoft.com/office/drawing/2014/main" id="{D7CCD917-845D-D835-B3BF-57D2E531DD79}"/>
+                <a16:creationId xmlns:a16="http://schemas.microsoft.com/office/drawing/2014/main" id="{0F2874C2-0B85-D60A-BA85-CDE593EF10AF}"/>
               </a:ext>
             </a:extLst>
           </p:cNvPr>
@@ -4946,7 +4949,7 @@
             <a:hlinkClick r:id="" action="ppaction://media"/>
             <a:extLst>
               <a:ext uri="{FF2B5EF4-FFF2-40B4-BE49-F238E27FC236}">
-                <a16:creationId xmlns:a16="http://schemas.microsoft.com/office/drawing/2014/main" id="{4AA00D58-6534-EEE1-1A7D-AD097B8AB95B}"/>
+                <a16:creationId xmlns:a16="http://schemas.microsoft.com/office/drawing/2014/main" id="{D96D01B5-236F-D04A-AB42-780D298F828B}"/>
               </a:ext>
             </a:extLst>
           </p:cNvPr>
@@ -4981,7 +4984,7 @@
     </p:spTree>
     <p:extLst>
       <p:ext uri="{BB962C8B-B14F-4D97-AF65-F5344CB8AC3E}">
-        <p14:creationId xmlns:p14="http://schemas.microsoft.com/office/powerpoint/2010/main" val="2681898908"/>
+        <p14:creationId xmlns:p14="http://schemas.microsoft.com/office/powerpoint/2010/main" val="1596704973"/>
       </p:ext>
     </p:extLst>
   </p:cSld>
@@ -5105,7 +5108,7 @@
           <p:cNvPr id="2" name="テキスト ボックス 1">
             <a:extLst>
               <a:ext uri="{FF2B5EF4-FFF2-40B4-BE49-F238E27FC236}">
-                <a16:creationId xmlns:a16="http://schemas.microsoft.com/office/drawing/2014/main" id="{80028CC9-70BB-7751-63B3-3481BFFEB464}"/>
+                <a16:creationId xmlns:a16="http://schemas.microsoft.com/office/drawing/2014/main" id="{695A37B0-1D48-4ED9-0D08-531A2448B627}"/>
               </a:ext>
             </a:extLst>
           </p:cNvPr>
@@ -5151,7 +5154,7 @@
           <p:cNvPr id="3" name="テキスト ボックス 2">
             <a:extLst>
               <a:ext uri="{FF2B5EF4-FFF2-40B4-BE49-F238E27FC236}">
-                <a16:creationId xmlns:a16="http://schemas.microsoft.com/office/drawing/2014/main" id="{3466E446-BBE6-6D89-0646-0F2CF9B88734}"/>
+                <a16:creationId xmlns:a16="http://schemas.microsoft.com/office/drawing/2014/main" id="{EFBDE6B3-135B-4A44-A806-AF9EB56CA10B}"/>
               </a:ext>
             </a:extLst>
           </p:cNvPr>
@@ -5191,7 +5194,7 @@
           <p:cNvPr id="4" name="テキスト ボックス 3">
             <a:extLst>
               <a:ext uri="{FF2B5EF4-FFF2-40B4-BE49-F238E27FC236}">
-                <a16:creationId xmlns:a16="http://schemas.microsoft.com/office/drawing/2014/main" id="{61DADA8F-B165-706E-C878-E02510BAFF8C}"/>
+                <a16:creationId xmlns:a16="http://schemas.microsoft.com/office/drawing/2014/main" id="{6ECFA974-9578-9C23-0B23-B92BF47BCD23}"/>
               </a:ext>
             </a:extLst>
           </p:cNvPr>
@@ -5221,43 +5224,7 @@
                 </a:solidFill>
                 <a:latin typeface="Arial" panose="020B0604020202020204" pitchFamily="34" charset="0"/>
               </a:rPr>
-              <a:t>サウナ・銭湯マップ（地図</a:t>
-            </a:r>
-            <a:r>
-              <a:rPr kumimoji="1" lang="en-US" altLang="ja-JP" sz="2000">
-                <a:solidFill>
-                  <a:srgbClr val="333333"/>
-                </a:solidFill>
-                <a:latin typeface="Arial" panose="020B0604020202020204" pitchFamily="34" charset="0"/>
-              </a:rPr>
-              <a:t>×</a:t>
-            </a:r>
-            <a:r>
-              <a:rPr kumimoji="1" lang="ja-JP" altLang="en-US" sz="2000">
-                <a:solidFill>
-                  <a:srgbClr val="333333"/>
-                </a:solidFill>
-                <a:latin typeface="Arial" panose="020B0604020202020204" pitchFamily="34" charset="0"/>
-              </a:rPr>
-              <a:t>混雑度</a:t>
-            </a:r>
-            <a:r>
-              <a:rPr kumimoji="1" lang="en-US" altLang="ja-JP" sz="2000">
-                <a:solidFill>
-                  <a:srgbClr val="333333"/>
-                </a:solidFill>
-                <a:latin typeface="Arial" panose="020B0604020202020204" pitchFamily="34" charset="0"/>
-              </a:rPr>
-              <a:t>UGC×LINE</a:t>
-            </a:r>
-            <a:r>
-              <a:rPr kumimoji="1" lang="ja-JP" altLang="en-US" sz="2000">
-                <a:solidFill>
-                  <a:srgbClr val="333333"/>
-                </a:solidFill>
-                <a:latin typeface="Arial" panose="020B0604020202020204" pitchFamily="34" charset="0"/>
-              </a:rPr>
-              <a:t>通知）を新規構築</a:t>
+              <a:t>直近のコミットでは、実装の見直しと継続的な改善が行われました。</a:t>
             </a:r>
           </a:p>
         </p:txBody>
@@ -5267,7 +5234,7 @@
           <p:cNvPr id="5" name="テキスト ボックス 4">
             <a:extLst>
               <a:ext uri="{FF2B5EF4-FFF2-40B4-BE49-F238E27FC236}">
-                <a16:creationId xmlns:a16="http://schemas.microsoft.com/office/drawing/2014/main" id="{458E896D-A3A2-CB8D-3B93-1B02DE9EEB5E}"/>
+                <a16:creationId xmlns:a16="http://schemas.microsoft.com/office/drawing/2014/main" id="{AC84B7E0-E4A9-B95B-FDF2-111E120776C4}"/>
               </a:ext>
             </a:extLst>
           </p:cNvPr>
@@ -5314,7 +5281,7 @@
             <a:hlinkClick r:id="" action="ppaction://media"/>
             <a:extLst>
               <a:ext uri="{FF2B5EF4-FFF2-40B4-BE49-F238E27FC236}">
-                <a16:creationId xmlns:a16="http://schemas.microsoft.com/office/drawing/2014/main" id="{9DCB8DFE-449B-EB90-36A0-7E9413B6A5FA}"/>
+                <a16:creationId xmlns:a16="http://schemas.microsoft.com/office/drawing/2014/main" id="{485A379B-59C1-6947-1EB8-01243306BBDB}"/>
               </a:ext>
             </a:extLst>
           </p:cNvPr>
@@ -5349,7 +5316,7 @@
     </p:spTree>
     <p:extLst>
       <p:ext uri="{BB962C8B-B14F-4D97-AF65-F5344CB8AC3E}">
-        <p14:creationId xmlns:p14="http://schemas.microsoft.com/office/powerpoint/2010/main" val="108606262"/>
+        <p14:creationId xmlns:p14="http://schemas.microsoft.com/office/powerpoint/2010/main" val="3211272953"/>
       </p:ext>
     </p:extLst>
   </p:cSld>
@@ -5358,10 +5325,10 @@
   </p:clrMapOvr>
   <mc:AlternateContent xmlns:mc="http://schemas.openxmlformats.org/markup-compatibility/2006">
     <mc:Choice xmlns:p14="http://schemas.microsoft.com/office/powerpoint/2010/main" Requires="p14">
-      <p:transition spd="slow" p14:dur="2000" advTm="12000"/>
+      <p:transition spd="slow" p14:dur="2000" advTm="7000"/>
     </mc:Choice>
     <mc:Fallback>
-      <p:transition spd="slow" advTm="12000"/>
+      <p:transition spd="slow" advTm="7000"/>
     </mc:Fallback>
   </mc:AlternateContent>
   <p:timing>
@@ -5392,7 +5359,7 @@
                                   <p:childTnLst>
                                     <p:cmd type="call" cmd="playFrom(0.0)">
                                       <p:cBhvr>
-                                        <p:cTn id="6" dur="11010" fill="hold"/>
+                                        <p:cTn id="6" dur="6076" fill="hold"/>
                                         <p:tgtEl>
                                           <p:spTgt spid="6"/>
                                         </p:tgtEl>
@@ -5473,7 +5440,7 @@
           <p:cNvPr id="2" name="テキスト ボックス 1">
             <a:extLst>
               <a:ext uri="{FF2B5EF4-FFF2-40B4-BE49-F238E27FC236}">
-                <a16:creationId xmlns:a16="http://schemas.microsoft.com/office/drawing/2014/main" id="{8BD6E065-7C3A-1D35-C63D-0D982941020A}"/>
+                <a16:creationId xmlns:a16="http://schemas.microsoft.com/office/drawing/2014/main" id="{EED91D96-098A-BD5E-F44F-E267263176EC}"/>
               </a:ext>
             </a:extLst>
           </p:cNvPr>
@@ -5519,7 +5486,7 @@
           <p:cNvPr id="3" name="テキスト ボックス 2">
             <a:extLst>
               <a:ext uri="{FF2B5EF4-FFF2-40B4-BE49-F238E27FC236}">
-                <a16:creationId xmlns:a16="http://schemas.microsoft.com/office/drawing/2014/main" id="{1A8C802C-B3D9-CE7A-83A8-B9C0BE523430}"/>
+                <a16:creationId xmlns:a16="http://schemas.microsoft.com/office/drawing/2014/main" id="{5791CF0A-E445-023E-1C86-15317C427217}"/>
               </a:ext>
             </a:extLst>
           </p:cNvPr>
@@ -5559,7 +5526,7 @@
           <p:cNvPr id="4" name="テキスト ボックス 3">
             <a:extLst>
               <a:ext uri="{FF2B5EF4-FFF2-40B4-BE49-F238E27FC236}">
-                <a16:creationId xmlns:a16="http://schemas.microsoft.com/office/drawing/2014/main" id="{44795997-C32C-A794-7D00-FE4FE36293FF}"/>
+                <a16:creationId xmlns:a16="http://schemas.microsoft.com/office/drawing/2014/main" id="{8CBEBE62-FAB8-EF8C-E98A-0D9D52D49D04}"/>
               </a:ext>
             </a:extLst>
           </p:cNvPr>
@@ -5624,7 +5591,7 @@
           <p:cNvPr id="5" name="テキスト ボックス 4">
             <a:extLst>
               <a:ext uri="{FF2B5EF4-FFF2-40B4-BE49-F238E27FC236}">
-                <a16:creationId xmlns:a16="http://schemas.microsoft.com/office/drawing/2014/main" id="{F67E3608-8234-F1E6-9C91-F0E39E5908F6}"/>
+                <a16:creationId xmlns:a16="http://schemas.microsoft.com/office/drawing/2014/main" id="{0409E26D-987F-DED5-9144-FC150E80042C}"/>
               </a:ext>
             </a:extLst>
           </p:cNvPr>
@@ -5671,7 +5638,7 @@
             <a:hlinkClick r:id="" action="ppaction://media"/>
             <a:extLst>
               <a:ext uri="{FF2B5EF4-FFF2-40B4-BE49-F238E27FC236}">
-                <a16:creationId xmlns:a16="http://schemas.microsoft.com/office/drawing/2014/main" id="{ED49FA9C-F2AF-1518-273F-1809ED68C816}"/>
+                <a16:creationId xmlns:a16="http://schemas.microsoft.com/office/drawing/2014/main" id="{1E6EADF5-FACC-EC7B-DB6B-293342CD1D8B}"/>
               </a:ext>
             </a:extLst>
           </p:cNvPr>
@@ -5706,7 +5673,7 @@
     </p:spTree>
     <p:extLst>
       <p:ext uri="{BB962C8B-B14F-4D97-AF65-F5344CB8AC3E}">
-        <p14:creationId xmlns:p14="http://schemas.microsoft.com/office/powerpoint/2010/main" val="3553219146"/>
+        <p14:creationId xmlns:p14="http://schemas.microsoft.com/office/powerpoint/2010/main" val="2709009571"/>
       </p:ext>
     </p:extLst>
   </p:cSld>
